--- a/public/pitch-decks/gamma/pptx/01-investor-overview.pptx
+++ b/public/pitch-decks/gamma/pptx/01-investor-overview.pptx
@@ -2348,7 +2348,7 @@
                   <a:srgbClr val="FFFFFF"/>
                 </a:solidFill>
               </a:rPr>
-              <a:t>Decision CrisisImmunizationInfrastructure</a:t>
+              <a:t>Decision Evidence Infrastructure for AI Systems</a:t>
             </a:r>
             <a:endParaRPr lang="en-US" sz="2400" dirty="0"/>
           </a:p>
@@ -3928,7 +3928,7 @@
                   <a:srgbClr val="FFFFFF"/>
                 </a:solidFill>
               </a:rPr>
-              <a:t>"Deploy Datacendia for 90 days on a single strategic problem. If the Council doesn't identify at least 3 critical risks you missed, we refund the pilot fee."</a:t>
+              <a:t>"EU AI Act (2025–2026) → enforceable auditability requirements. DORA → operational traceability for financial services. Litigation risk → retrospective scrutiny of AI decisions. Enterprise AI adoption → exploding unaudited decision surface. This creates a new infrastructure requirement: decision evidence."</a:t>
             </a:r>
             <a:endParaRPr lang="en-US" sz="2200" dirty="0"/>
           </a:p>
@@ -5939,6 +5939,10 @@
           </a:solidFill>
           <a:ln/>
         </p:spPr>
+        <p:txBody>
+          <a:bodyPr/>
+          <a:p/>
+        </p:txBody>
       </p:sp>
       <p:sp>
         <p:nvSpPr>
@@ -6033,6 +6037,10 @@
           </a:solidFill>
           <a:ln/>
         </p:spPr>
+        <p:txBody>
+          <a:bodyPr/>
+          <a:p/>
+        </p:txBody>
       </p:sp>
       <p:sp>
         <p:nvSpPr>
@@ -6127,6 +6135,10 @@
           </a:solidFill>
           <a:ln/>
         </p:spPr>
+        <p:txBody>
+          <a:bodyPr/>
+          <a:p/>
+        </p:txBody>
       </p:sp>
       <p:sp>
         <p:nvSpPr>
@@ -6221,6 +6233,10 @@
           </a:solidFill>
           <a:ln/>
         </p:spPr>
+        <p:txBody>
+          <a:bodyPr/>
+          <a:p/>
+        </p:txBody>
       </p:sp>
       <p:sp>
         <p:nvSpPr>
@@ -6315,6 +6331,10 @@
           </a:solidFill>
           <a:ln/>
         </p:spPr>
+        <p:txBody>
+          <a:bodyPr/>
+          <a:p/>
+        </p:txBody>
       </p:sp>
       <p:sp>
         <p:nvSpPr>
@@ -6409,6 +6429,10 @@
           </a:solidFill>
           <a:ln/>
         </p:spPr>
+        <p:txBody>
+          <a:bodyPr/>
+          <a:p/>
+        </p:txBody>
       </p:sp>
       <p:sp>
         <p:nvSpPr>
@@ -6503,6 +6527,10 @@
           </a:solidFill>
           <a:ln/>
         </p:spPr>
+        <p:txBody>
+          <a:bodyPr/>
+          <a:p/>
+        </p:txBody>
       </p:sp>
       <p:sp>
         <p:nvSpPr>
@@ -6597,6 +6625,10 @@
           </a:solidFill>
           <a:ln/>
         </p:spPr>
+        <p:txBody>
+          <a:bodyPr/>
+          <a:p/>
+        </p:txBody>
       </p:sp>
       <p:sp>
         <p:nvSpPr>
